--- a/kickoff/presentations/ppts/kickoff.pptx
+++ b/kickoff/presentations/ppts/kickoff.pptx
@@ -6509,7 +6509,7 @@
             </a:pPr>
             <a:r>
               <a:rPr/>
-              <a:t>Full setup instructions are in setup/TECH-SETUP.md.</a:t>
+              <a:t>Full setup instructions are in participant-setup/TECH-SETUP.md.</a:t>
             </a:r>
           </a:p>
         </p:txBody>

--- a/kickoff/presentations/ppts/kickoff.pptx
+++ b/kickoff/presentations/ppts/kickoff.pptx
@@ -5906,6 +5906,15 @@
             </a:pPr>
             <a:r>
               <a:rPr/>
+              <a:t>Week 7 goes deep on Azure DevOps (ADO), our delivery toolchain.</a:t>
+            </a:r>
+          </a:p>
+          <a:p>
+            <a:pPr lvl="0" indent="0" marL="0">
+              <a:buNone/>
+            </a:pPr>
+            <a:r>
+              <a:rPr/>
               <a:t>Week</a:t>
             </a:r>
           </a:p>
@@ -8159,7 +8168,7 @@
             </a:pPr>
             <a:r>
               <a:rPr/>
-              <a:t>Owns a PRD that engineering can build and customers will value</a:t>
+              <a:t>Owns a product requirements document (PRD) that engineering can build and customers will value</a:t>
             </a:r>
           </a:p>
           <a:p>

--- a/kickoff/presentations/ppts/kickoff.pptx
+++ b/kickoff/presentations/ppts/kickoff.pptx
@@ -794,7 +794,7 @@
             </a:pPr>
             <a:r>
               <a:rPr/>
-              <a:t>The first half of this block is map-and-commitment. The second half is the triad formation activity — the single most important decision of the morning.</a:t>
+              <a:t>The first half of this block is map-and-commitment. The second half is the quad formation activity — the single most important decision of the morning.</a:t>
             </a:r>
           </a:p>
         </p:txBody>
@@ -1204,7 +1204,7 @@
             </a:pPr>
             <a:r>
               <a:rPr/>
-              <a:t>Triad composition is the most consequential decision of the day. After Week 3, we reshuffle to expose participants to different working styles before the final capstone, where they pick their own collaborators.</a:t>
+              <a:t>Quad composition is the most consequential decision of the day. After Week 3, we reshuffle to expose participants to different working styles before the final capstone, where they pick their own collaborators.</a:t>
             </a:r>
           </a:p>
         </p:txBody>
@@ -1286,7 +1286,7 @@
             </a:pPr>
             <a:r>
               <a:rPr/>
-              <a:t>This is the most important 25 minutes of the half-day. Watch for cliques re-forming — if two friends end up in the same triad, gently break it up. Have index cards and Sharpies ready.</a:t>
+              <a:t>This is the most important 25 minutes of the half-day. Watch for cliques re-forming — if two friends end up in the same quad, gently break it up. Have index cards and Sharpies ready.</a:t>
             </a:r>
           </a:p>
         </p:txBody>
@@ -1368,7 +1368,7 @@
             </a:pPr>
             <a:r>
               <a:rPr/>
-              <a:t>Final stretch. The cohort has the most cognitive headroom right after triad formation — use it for the logistics they’ll actually retain.</a:t>
+              <a:t>Final stretch. The cohort has the most cognitive headroom right after quad formation — use it for the logistics they’ll actually retain.</a:t>
             </a:r>
           </a:p>
         </p:txBody>
@@ -5806,7 +5806,7 @@
             </a:pPr>
             <a:r>
               <a:rPr/>
-              <a:t>Block 2 — Curriculum Tour + Triad Formation</a:t>
+              <a:t>Block 2 — Curriculum Tour + Quad Formation</a:t>
             </a:r>
           </a:p>
         </p:txBody>
@@ -6230,7 +6230,7 @@
             </a:pPr>
             <a:r>
               <a:rPr/>
-              <a:t>Triad-built PRD</a:t>
+              <a:t>Quad-built PRD</a:t>
             </a:r>
           </a:p>
           <a:p>
@@ -6248,7 +6248,7 @@
             </a:pPr>
             <a:r>
               <a:rPr/>
-              <a:t>Peer review on Friday — every triad reads every other triad</a:t>
+              <a:t>Peer review on Friday — every quad reads every other quad</a:t>
             </a:r>
           </a:p>
           <a:p>
@@ -6565,7 +6565,7 @@
             </a:pPr>
             <a:r>
               <a:rPr/>
-              <a:t>🧑‍🤝‍🧑 Triads — The Heart of the Cohort</a:t>
+              <a:t>🧑‍🤝‍🧑 Quads — The Heart of the Cohort</a:t>
             </a:r>
           </a:p>
         </p:txBody>
@@ -6590,25 +6590,25 @@
             </a:pPr>
             <a:r>
               <a:rPr/>
-              <a:t>Three participants per triad — fixed through end of Week 3</a:t>
-            </a:r>
-          </a:p>
-          <a:p>
-            <a:pPr lvl="0" indent="0" marL="0">
-              <a:buNone/>
-            </a:pPr>
-            <a:r>
-              <a:rPr/>
-              <a:t>Every activity is run in triad unless otherwise marked</a:t>
-            </a:r>
-          </a:p>
-          <a:p>
-            <a:pPr lvl="0" indent="0" marL="0">
-              <a:buNone/>
-            </a:pPr>
-            <a:r>
-              <a:rPr/>
-              <a:t>Triads carry the Week 3 mini-capstone PRD together</a:t>
+              <a:t>Three participants per quad — fixed through end of Week 3</a:t>
+            </a:r>
+          </a:p>
+          <a:p>
+            <a:pPr lvl="0" indent="0" marL="0">
+              <a:buNone/>
+            </a:pPr>
+            <a:r>
+              <a:rPr/>
+              <a:t>Every activity is run in quad unless otherwise marked</a:t>
+            </a:r>
+          </a:p>
+          <a:p>
+            <a:pPr lvl="0" indent="0" marL="0">
+              <a:buNone/>
+            </a:pPr>
+            <a:r>
+              <a:rPr/>
+              <a:t>Quads carry the Week 3 mini-capstone PRD together</a:t>
             </a:r>
           </a:p>
           <a:p>
@@ -6626,7 +6626,7 @@
             </a:pPr>
             <a:r>
               <a:rPr/>
-              <a:t>Triads reshuffle for Weeks 4–8</a:t>
+              <a:t>Quads reshuffle for Weeks 4–8</a:t>
             </a:r>
           </a:p>
         </p:txBody>
@@ -6673,7 +6673,7 @@
             </a:pPr>
             <a:r>
               <a:rPr/>
-              <a:t>🧪 Activity 3 — Triad Formation + First Commitment</a:t>
+              <a:t>🧪 Activity 3 — Quad Formation + First Commitment</a:t>
             </a:r>
           </a:p>
         </p:txBody>
@@ -6698,7 +6698,7 @@
             </a:pPr>
             <a:r>
               <a:rPr/>
-              <a:t>Format: Self-organize → triads • 25 min</a:t>
+              <a:t>Format: Self-organize → quads • 25 min</a:t>
             </a:r>
           </a:p>
           <a:p>
@@ -6716,34 +6716,34 @@
             </a:pPr>
             <a:r>
               <a:rPr/>
-              <a:t>Sit together. You are a triad through end of Week 3</a:t>
-            </a:r>
-          </a:p>
-          <a:p>
-            <a:pPr lvl="0" indent="0" marL="0">
-              <a:buNone/>
-            </a:pPr>
-            <a:r>
-              <a:rPr/>
-              <a:t>Write a one-sentence triad commitment — something like: “We will tell each other when our drafts are weak, before peer review tells us”</a:t>
-            </a:r>
-          </a:p>
-          <a:p>
-            <a:pPr lvl="0" indent="0" marL="0">
-              <a:buNone/>
-            </a:pPr>
-            <a:r>
-              <a:rPr/>
-              <a:t>Share triad names + commitments with the room — 30 seconds per triad</a:t>
-            </a:r>
-          </a:p>
-          <a:p>
-            <a:pPr lvl="0" indent="0" marL="0">
-              <a:buNone/>
-            </a:pPr>
-            <a:r>
-              <a:rPr/>
-              <a:t>Deliverable: a named triad and a written commitment, on a single index card.</a:t>
+              <a:t>Sit together. You are a quad through end of Week 3</a:t>
+            </a:r>
+          </a:p>
+          <a:p>
+            <a:pPr lvl="0" indent="0" marL="0">
+              <a:buNone/>
+            </a:pPr>
+            <a:r>
+              <a:rPr/>
+              <a:t>Write a one-sentence quad commitment — something like: “We will tell each other when our drafts are weak, before peer review tells us”</a:t>
+            </a:r>
+          </a:p>
+          <a:p>
+            <a:pPr lvl="0" indent="0" marL="0">
+              <a:buNone/>
+            </a:pPr>
+            <a:r>
+              <a:rPr/>
+              <a:t>Share quad names + commitments with the room — 30 seconds per quad</a:t>
+            </a:r>
+          </a:p>
+          <a:p>
+            <a:pPr lvl="0" indent="0" marL="0">
+              <a:buNone/>
+            </a:pPr>
+            <a:r>
+              <a:rPr/>
+              <a:t>Deliverable: a named quad and a written commitment, on a single index card.</a:t>
             </a:r>
           </a:p>
         </p:txBody>
@@ -7208,7 +7208,7 @@
             </a:pPr>
             <a:r>
               <a:rPr/>
-              <a:t>Triad-internal: keep it direct, low-stakes</a:t>
+              <a:t>Quad-internal: keep it direct, low-stakes</a:t>
             </a:r>
           </a:p>
           <a:p>
@@ -7361,7 +7361,7 @@
             </a:pPr>
             <a:r>
               <a:rPr/>
-              <a:t>Your triad commitment card</a:t>
+              <a:t>Your quad commitment card</a:t>
             </a:r>
           </a:p>
         </p:txBody>
@@ -7460,7 +7460,7 @@
             </a:pPr>
             <a:r>
               <a:rPr/>
-              <a:t>“Can our triad change if it’s not working?”</a:t>
+              <a:t>“Can our quad change if it’s not working?”</a:t>
             </a:r>
           </a:p>
           <a:p>
@@ -7652,7 +7652,7 @@
             </a:pPr>
             <a:r>
               <a:rPr/>
-              <a:t>Form the triads you’ll work with through Week 3’s mini-capstone</a:t>
+              <a:t>Form the quads you’ll work with through Week 3’s mini-capstone</a:t>
             </a:r>
           </a:p>
           <a:p>
@@ -7850,16 +7850,16 @@
             </a:pPr>
             <a:r>
               <a:rPr/>
-              <a:t>Block 2 — Curriculum Tour + Triad Formation</a:t>
-            </a:r>
-          </a:p>
-          <a:p>
-            <a:pPr lvl="0" indent="0" marL="0">
-              <a:buNone/>
-            </a:pPr>
-            <a:r>
-              <a:rPr/>
-              <a:t>Eight-week map; your triad</a:t>
+              <a:t>Block 2 — Curriculum Tour + Quad Formation</a:t>
+            </a:r>
+          </a:p>
+          <a:p>
+            <a:pPr lvl="0" indent="0" marL="0">
+              <a:buNone/>
+            </a:pPr>
+            <a:r>
+              <a:rPr/>
+              <a:t>Eight-week map; your quad</a:t>
             </a:r>
           </a:p>
           <a:p>
